--- a/IPL-CSK-Analysis-PowerBI.pptx
+++ b/IPL-CSK-Analysis-PowerBI.pptx
@@ -42,10 +42,6 @@
     <p:embeddedFont>
       <p:font typeface="Times New Roman" charset="1" panose="02020603050405020304"/>
       <p:regular r:id="rId24"/>
-    </p:embeddedFont>
-    <p:embeddedFont>
-      <p:font typeface="ITC Franklin Gothic LT" charset="1" panose="020B0504030503020204"/>
-      <p:regular r:id="rId25"/>
     </p:embeddedFont>
   </p:embeddedFontLst>
   <p:defaultTextStyle>
@@ -4765,8 +4761,8 @@
         </p:nvSpPr>
         <p:spPr>
           <a:xfrm rot="0">
-            <a:off x="386648" y="2343836"/>
-            <a:ext cx="15590520" cy="6315075"/>
+            <a:off x="386648" y="2019300"/>
+            <a:ext cx="15590520" cy="4507992"/>
           </a:xfrm>
           <a:prstGeom prst="rect">
             <a:avLst/>
@@ -4783,18 +4779,6 @@
                 <a:spcPts val="3564"/>
               </a:lnSpc>
             </a:pPr>
-            <a:r>
-              <a:rPr lang="en-US" sz="3300">
-                <a:solidFill>
-                  <a:srgbClr val="000000"/>
-                </a:solidFill>
-                <a:latin typeface="ITC Franklin Gothic LT"/>
-                <a:ea typeface="ITC Franklin Gothic LT"/>
-                <a:cs typeface="ITC Franklin Gothic LT"/>
-                <a:sym typeface="ITC Franklin Gothic LT"/>
-              </a:rPr>
-              <a:t>List and cite relevant sources, research papers, and articles that were instrumental in developing the proposed solution. This could include academic papers on bike demand prediction, machine learning algorithms, and best practices in data preprocessing and model evaluation.</a:t>
-            </a:r>
           </a:p>
           <a:p>
             <a:pPr algn="l">
@@ -4803,40 +4787,119 @@
               </a:lnSpc>
             </a:pPr>
             <a:r>
+              <a:rPr lang="en-US" sz="3300" b="true">
+                <a:solidFill>
+                  <a:srgbClr val="000000"/>
+                </a:solidFill>
+                <a:latin typeface="Times New Roman Bold"/>
+                <a:ea typeface="Times New Roman Bold"/>
+                <a:cs typeface="Times New Roman Bold"/>
+                <a:sym typeface="Times New Roman Bold"/>
+              </a:rPr>
+              <a:t>Data Sources:-</a:t>
+            </a:r>
+          </a:p>
+          <a:p>
+            <a:pPr algn="l" marL="712470" indent="-356235" lvl="1">
+              <a:lnSpc>
+                <a:spcPts val="3564"/>
+              </a:lnSpc>
+              <a:buFont typeface="Arial"/>
+              <a:buChar char="•"/>
+            </a:pPr>
+            <a:r>
+              <a:rPr lang="en-US" b="true" sz="3300">
+                <a:solidFill>
+                  <a:srgbClr val="000000"/>
+                </a:solidFill>
+                <a:latin typeface="Times New Roman Bold"/>
+                <a:ea typeface="Times New Roman Bold"/>
+                <a:cs typeface="Times New Roman Bold"/>
+                <a:sym typeface="Times New Roman Bold"/>
+              </a:rPr>
+              <a:t>Kaggle IP</a:t>
+            </a:r>
+            <a:r>
+              <a:rPr lang="en-US" b="true" sz="3300">
+                <a:solidFill>
+                  <a:srgbClr val="000000"/>
+                </a:solidFill>
+                <a:latin typeface="Times New Roman Bold"/>
+                <a:ea typeface="Times New Roman Bold"/>
+                <a:cs typeface="Times New Roman Bold"/>
+                <a:sym typeface="Times New Roman Bold"/>
+              </a:rPr>
+              <a:t>L Dataset (2008-2022): </a:t>
+            </a:r>
+            <a:r>
               <a:rPr lang="en-US" sz="3300">
                 <a:solidFill>
                   <a:srgbClr val="000000"/>
                 </a:solidFill>
-                <a:latin typeface="ITC Franklin Gothic LT"/>
-                <a:ea typeface="ITC Franklin Gothic LT"/>
-                <a:cs typeface="ITC Franklin Gothic LT"/>
-                <a:sym typeface="ITC Franklin Gothic LT"/>
-              </a:rPr>
-              <a:t>GitHub Link:</a:t>
+                <a:latin typeface="Times New Roman"/>
+                <a:ea typeface="Times New Roman"/>
+                <a:cs typeface="Times New Roman"/>
+                <a:sym typeface="Times New Roman"/>
+              </a:rPr>
+              <a:t>Primary source for match-level and ball-by-ball data used in the analysis. [Link: </a:t>
+            </a:r>
+            <a:r>
+              <a:rPr lang="en-US" sz="3300" u="sng">
+                <a:solidFill>
+                  <a:srgbClr val="0070C0"/>
+                </a:solidFill>
+                <a:latin typeface="Times New Roman"/>
+                <a:ea typeface="Times New Roman"/>
+                <a:cs typeface="Times New Roman"/>
+                <a:sym typeface="Times New Roman"/>
+                <a:hlinkClick r:id="rId3" tooltip="https://kaggle.com/datasets"/>
+              </a:rPr>
+              <a:t>kaggle.com/datasets</a:t>
             </a:r>
             <a:r>
               <a:rPr lang="en-US" sz="3300">
                 <a:solidFill>
-                  <a:srgbClr val="0070C0"/>
-                </a:solidFill>
-                <a:latin typeface="ITC Franklin Gothic LT"/>
-                <a:ea typeface="ITC Franklin Gothic LT"/>
-                <a:cs typeface="ITC Franklin Gothic LT"/>
-                <a:sym typeface="ITC Franklin Gothic LT"/>
-              </a:rPr>
-              <a:t> </a:t>
-            </a:r>
-            <a:r>
-              <a:rPr lang="en-US" sz="3300" u="sng">
-                <a:solidFill>
-                  <a:srgbClr val="0070C0"/>
-                </a:solidFill>
-                <a:latin typeface="ITC Franklin Gothic LT"/>
-                <a:ea typeface="ITC Franklin Gothic LT"/>
-                <a:cs typeface="ITC Franklin Gothic LT"/>
-                <a:sym typeface="ITC Franklin Gothic LT"/>
-              </a:rPr>
-              <a:t>Link</a:t>
+                  <a:srgbClr val="000000"/>
+                </a:solidFill>
+                <a:latin typeface="Times New Roman"/>
+                <a:ea typeface="Times New Roman"/>
+                <a:cs typeface="Times New Roman"/>
+                <a:sym typeface="Times New Roman"/>
+              </a:rPr>
+              <a:t>]</a:t>
+            </a:r>
+          </a:p>
+          <a:p>
+            <a:pPr algn="l" marL="712470" indent="-356235" lvl="1">
+              <a:lnSpc>
+                <a:spcPts val="3564"/>
+              </a:lnSpc>
+              <a:buFont typeface="Arial"/>
+              <a:buChar char="•"/>
+            </a:pPr>
+            <a:r>
+              <a:rPr lang="en-US" b="true" sz="3300">
+                <a:solidFill>
+                  <a:srgbClr val="000000"/>
+                </a:solidFill>
+                <a:latin typeface="Times New Roman Bold"/>
+                <a:ea typeface="Times New Roman Bold"/>
+                <a:cs typeface="Times New Roman Bold"/>
+                <a:sym typeface="Times New Roman Bold"/>
+              </a:rPr>
+              <a:t>IPL Official Website (iplt20.com):</a:t>
+            </a:r>
+            <a:r>
+              <a:rPr lang="en-US" sz="3300">
+                <a:solidFill>
+                  <a:srgbClr val="000000"/>
+                </a:solidFill>
+                <a:latin typeface="Times New Roman"/>
+                <a:ea typeface="Times New Roman"/>
+                <a:cs typeface="Times New Roman"/>
+                <a:sym typeface="Times New Roman"/>
+              </a:rPr>
+              <a:t> Used for verifying historical team records and stadium information.</a:t>
             </a:r>
           </a:p>
           <a:p>
@@ -4845,6 +4908,58 @@
                 <a:spcPts val="3564"/>
               </a:lnSpc>
             </a:pPr>
+          </a:p>
+          <a:p>
+            <a:pPr algn="l">
+              <a:lnSpc>
+                <a:spcPts val="3564"/>
+              </a:lnSpc>
+            </a:pPr>
+            <a:r>
+              <a:rPr lang="en-US" sz="3300" b="true">
+                <a:solidFill>
+                  <a:srgbClr val="000000"/>
+                </a:solidFill>
+                <a:latin typeface="Times New Roman Bold"/>
+                <a:ea typeface="Times New Roman Bold"/>
+                <a:cs typeface="Times New Roman Bold"/>
+                <a:sym typeface="Times New Roman Bold"/>
+              </a:rPr>
+              <a:t>GitHub Link Section:-</a:t>
+            </a:r>
+          </a:p>
+          <a:p>
+            <a:pPr algn="l" marL="712470" indent="-356235" lvl="1">
+              <a:lnSpc>
+                <a:spcPts val="3564"/>
+              </a:lnSpc>
+              <a:buFont typeface="Arial"/>
+              <a:buChar char="•"/>
+            </a:pPr>
+            <a:r>
+              <a:rPr lang="en-US" b="true" sz="3300">
+                <a:solidFill>
+                  <a:srgbClr val="000000"/>
+                </a:solidFill>
+                <a:latin typeface="Times New Roman Bold"/>
+                <a:ea typeface="Times New Roman Bold"/>
+                <a:cs typeface="Times New Roman Bold"/>
+                <a:sym typeface="Times New Roman Bold"/>
+              </a:rPr>
+              <a:t>Project Repository: </a:t>
+            </a:r>
+            <a:r>
+              <a:rPr lang="en-US" sz="3300">
+                <a:solidFill>
+                  <a:srgbClr val="000000"/>
+                </a:solidFill>
+                <a:latin typeface="Times New Roman"/>
+                <a:ea typeface="Times New Roman"/>
+                <a:cs typeface="Times New Roman"/>
+                <a:sym typeface="Times New Roman"/>
+              </a:rPr>
+              <a:t>https://github.com/bharatsinhrathod/IPL-CSK-Analysis-PowerBI</a:t>
+            </a:r>
           </a:p>
           <a:p>
             <a:pPr algn="l">
